--- a/latex/popl2027/flow.pptx
+++ b/latex/popl2027/flow.pptx
@@ -2,7 +2,7 @@
 <file path=ppt/presentation.xml><?xml version="1.0" encoding="utf-8"?>
 <p:presentation xmlns:a="http://schemas.openxmlformats.org/drawingml/2006/main" xmlns:r="http://schemas.openxmlformats.org/officeDocument/2006/relationships" xmlns:p="http://schemas.openxmlformats.org/presentationml/2006/main" saveSubsetFonts="1" autoCompressPictures="0">
   <p:sldMasterIdLst>
-    <p:sldMasterId id="2147483684" r:id="rId1"/>
+    <p:sldMasterId id="2147483696" r:id="rId1"/>
   </p:sldMasterIdLst>
   <p:notesMasterIdLst>
     <p:notesMasterId r:id="rId3"/>
@@ -10,7 +10,7 @@
   <p:sldIdLst>
     <p:sldId id="256" r:id="rId2"/>
   </p:sldIdLst>
-  <p:sldSz cx="45720000" cy="6858000"/>
+  <p:sldSz cx="51206400" cy="6858000"/>
   <p:notesSz cx="6858000" cy="9144000"/>
   <p:defaultTextStyle>
     <a:defPPr>
@@ -164,7 +164,7 @@
             </a:lvl1pPr>
           </a:lstStyle>
           <a:p>
-            <a:endParaRPr lang="en-US"/>
+            <a:endParaRPr lang="en-US" dirty="0"/>
           </a:p>
         </p:txBody>
       </p:sp>
@@ -197,9 +197,9 @@
           <a:p>
             <a:fld id="{0709DEA7-5E0E-B342-9CE4-FCF21B1958E0}" type="datetimeFigureOut">
               <a:rPr lang="en-US" smtClean="0"/>
-              <a:t>6/15/25</a:t>
+              <a:t>6/28/26</a:t>
             </a:fld>
-            <a:endParaRPr lang="en-US"/>
+            <a:endParaRPr lang="en-US" dirty="0"/>
           </a:p>
         </p:txBody>
       </p:sp>
@@ -215,8 +215,8 @@
         </p:nvSpPr>
         <p:spPr>
           <a:xfrm>
-            <a:off x="-6858000" y="1143000"/>
-            <a:ext cx="20574000" cy="3086100"/>
+            <a:off x="-8091488" y="1143000"/>
+            <a:ext cx="23040976" cy="3086100"/>
           </a:xfrm>
           <a:prstGeom prst="rect">
             <a:avLst/>
@@ -232,7 +232,7 @@
           <a:bodyPr vert="horz" lIns="91440" tIns="45720" rIns="91440" bIns="45720" rtlCol="0" anchor="ctr"/>
           <a:lstStyle/>
           <a:p>
-            <a:endParaRPr lang="en-US"/>
+            <a:endParaRPr lang="en-US" dirty="0"/>
           </a:p>
         </p:txBody>
       </p:sp>
@@ -322,7 +322,7 @@
             </a:lvl1pPr>
           </a:lstStyle>
           <a:p>
-            <a:endParaRPr lang="en-US"/>
+            <a:endParaRPr lang="en-US" dirty="0"/>
           </a:p>
         </p:txBody>
       </p:sp>
@@ -357,7 +357,7 @@
               <a:rPr lang="en-US" smtClean="0"/>
               <a:t>‹#›</a:t>
             </a:fld>
-            <a:endParaRPr lang="en-US"/>
+            <a:endParaRPr lang="en-US" dirty="0"/>
           </a:p>
         </p:txBody>
       </p:sp>
@@ -493,10 +493,17 @@
         </p:nvSpPr>
         <p:spPr>
           <a:xfrm>
-            <a:off x="-6858000" y="1143000"/>
-            <a:ext cx="20574000" cy="3086100"/>
-          </a:xfrm>
-        </p:spPr>
+            <a:off x="-8091488" y="1143000"/>
+            <a:ext cx="23040976" cy="3086100"/>
+          </a:xfrm>
+        </p:spPr>
+        <p:txBody>
+          <a:bodyPr/>
+          <a:lstStyle/>
+          <a:p>
+            <a:endParaRPr lang="en-US"/>
+          </a:p>
+        </p:txBody>
       </p:sp>
       <p:sp>
         <p:nvSpPr>
@@ -536,7 +543,7 @@
               <a:rPr lang="en-US" smtClean="0"/>
               <a:t>1</a:t>
             </a:fld>
-            <a:endParaRPr lang="en-US"/>
+            <a:endParaRPr lang="en-US" dirty="0"/>
           </a:p>
         </p:txBody>
       </p:sp>
@@ -582,8 +589,8 @@
         </p:nvSpPr>
         <p:spPr>
           <a:xfrm>
-            <a:off x="5715000" y="1122363"/>
-            <a:ext cx="34290000" cy="2387600"/>
+            <a:off x="6400800" y="1122363"/>
+            <a:ext cx="38404800" cy="2387600"/>
           </a:xfrm>
         </p:spPr>
         <p:txBody>
@@ -614,8 +621,8 @@
         </p:nvSpPr>
         <p:spPr>
           <a:xfrm>
-            <a:off x="5715000" y="3602038"/>
-            <a:ext cx="34290000" cy="1655762"/>
+            <a:off x="6400800" y="3602038"/>
+            <a:ext cx="38404800" cy="1655762"/>
           </a:xfrm>
         </p:spPr>
         <p:txBody>
@@ -684,9 +691,9 @@
           <a:p>
             <a:fld id="{FAC548D3-0433-7442-8CA6-6A33DD5FB3B5}" type="datetimeFigureOut">
               <a:rPr lang="en-US" smtClean="0"/>
-              <a:t>6/15/25</a:t>
+              <a:t>6/28/26</a:t>
             </a:fld>
-            <a:endParaRPr lang="en-US"/>
+            <a:endParaRPr lang="en-US" dirty="0"/>
           </a:p>
         </p:txBody>
       </p:sp>
@@ -705,7 +712,7 @@
           <a:bodyPr/>
           <a:lstStyle/>
           <a:p>
-            <a:endParaRPr lang="en-US"/>
+            <a:endParaRPr lang="en-US" dirty="0"/>
           </a:p>
         </p:txBody>
       </p:sp>
@@ -728,14 +735,14 @@
               <a:rPr lang="en-US" smtClean="0"/>
               <a:t>‹#›</a:t>
             </a:fld>
-            <a:endParaRPr lang="en-US"/>
+            <a:endParaRPr lang="en-US" dirty="0"/>
           </a:p>
         </p:txBody>
       </p:sp>
     </p:spTree>
     <p:extLst>
       <p:ext uri="{BB962C8B-B14F-4D97-AF65-F5344CB8AC3E}">
-        <p14:creationId xmlns:p14="http://schemas.microsoft.com/office/powerpoint/2010/main" val="450209245"/>
+        <p14:creationId xmlns:p14="http://schemas.microsoft.com/office/powerpoint/2010/main" val="214024769"/>
       </p:ext>
     </p:extLst>
   </p:cSld>
@@ -854,9 +861,9 @@
           <a:p>
             <a:fld id="{FAC548D3-0433-7442-8CA6-6A33DD5FB3B5}" type="datetimeFigureOut">
               <a:rPr lang="en-US" smtClean="0"/>
-              <a:t>6/15/25</a:t>
+              <a:t>6/28/26</a:t>
             </a:fld>
-            <a:endParaRPr lang="en-US"/>
+            <a:endParaRPr lang="en-US" dirty="0"/>
           </a:p>
         </p:txBody>
       </p:sp>
@@ -875,7 +882,7 @@
           <a:bodyPr/>
           <a:lstStyle/>
           <a:p>
-            <a:endParaRPr lang="en-US"/>
+            <a:endParaRPr lang="en-US" dirty="0"/>
           </a:p>
         </p:txBody>
       </p:sp>
@@ -898,14 +905,14 @@
               <a:rPr lang="en-US" smtClean="0"/>
               <a:t>‹#›</a:t>
             </a:fld>
-            <a:endParaRPr lang="en-US"/>
+            <a:endParaRPr lang="en-US" dirty="0"/>
           </a:p>
         </p:txBody>
       </p:sp>
     </p:spTree>
     <p:extLst>
       <p:ext uri="{BB962C8B-B14F-4D97-AF65-F5344CB8AC3E}">
-        <p14:creationId xmlns:p14="http://schemas.microsoft.com/office/powerpoint/2010/main" val="3193141836"/>
+        <p14:creationId xmlns:p14="http://schemas.microsoft.com/office/powerpoint/2010/main" val="3492702395"/>
       </p:ext>
     </p:extLst>
   </p:cSld>
@@ -944,8 +951,8 @@
         </p:nvSpPr>
         <p:spPr>
           <a:xfrm>
-            <a:off x="32718375" y="365125"/>
-            <a:ext cx="9858375" cy="5811838"/>
+            <a:off x="36644580" y="365125"/>
+            <a:ext cx="11041380" cy="5811838"/>
           </a:xfrm>
         </p:spPr>
         <p:txBody>
@@ -972,8 +979,8 @@
         </p:nvSpPr>
         <p:spPr>
           <a:xfrm>
-            <a:off x="3143250" y="365125"/>
-            <a:ext cx="29003625" cy="5811838"/>
+            <a:off x="3520440" y="365125"/>
+            <a:ext cx="32484060" cy="5811838"/>
           </a:xfrm>
         </p:spPr>
         <p:txBody>
@@ -1034,9 +1041,9 @@
           <a:p>
             <a:fld id="{FAC548D3-0433-7442-8CA6-6A33DD5FB3B5}" type="datetimeFigureOut">
               <a:rPr lang="en-US" smtClean="0"/>
-              <a:t>6/15/25</a:t>
+              <a:t>6/28/26</a:t>
             </a:fld>
-            <a:endParaRPr lang="en-US"/>
+            <a:endParaRPr lang="en-US" dirty="0"/>
           </a:p>
         </p:txBody>
       </p:sp>
@@ -1055,7 +1062,7 @@
           <a:bodyPr/>
           <a:lstStyle/>
           <a:p>
-            <a:endParaRPr lang="en-US"/>
+            <a:endParaRPr lang="en-US" dirty="0"/>
           </a:p>
         </p:txBody>
       </p:sp>
@@ -1078,14 +1085,14 @@
               <a:rPr lang="en-US" smtClean="0"/>
               <a:t>‹#›</a:t>
             </a:fld>
-            <a:endParaRPr lang="en-US"/>
+            <a:endParaRPr lang="en-US" dirty="0"/>
           </a:p>
         </p:txBody>
       </p:sp>
     </p:spTree>
     <p:extLst>
       <p:ext uri="{BB962C8B-B14F-4D97-AF65-F5344CB8AC3E}">
-        <p14:creationId xmlns:p14="http://schemas.microsoft.com/office/powerpoint/2010/main" val="2021972261"/>
+        <p14:creationId xmlns:p14="http://schemas.microsoft.com/office/powerpoint/2010/main" val="497406731"/>
       </p:ext>
     </p:extLst>
   </p:cSld>
@@ -1204,9 +1211,9 @@
           <a:p>
             <a:fld id="{FAC548D3-0433-7442-8CA6-6A33DD5FB3B5}" type="datetimeFigureOut">
               <a:rPr lang="en-US" smtClean="0"/>
-              <a:t>6/15/25</a:t>
+              <a:t>6/28/26</a:t>
             </a:fld>
-            <a:endParaRPr lang="en-US"/>
+            <a:endParaRPr lang="en-US" dirty="0"/>
           </a:p>
         </p:txBody>
       </p:sp>
@@ -1225,7 +1232,7 @@
           <a:bodyPr/>
           <a:lstStyle/>
           <a:p>
-            <a:endParaRPr lang="en-US"/>
+            <a:endParaRPr lang="en-US" dirty="0"/>
           </a:p>
         </p:txBody>
       </p:sp>
@@ -1248,14 +1255,14 @@
               <a:rPr lang="en-US" smtClean="0"/>
               <a:t>‹#›</a:t>
             </a:fld>
-            <a:endParaRPr lang="en-US"/>
+            <a:endParaRPr lang="en-US" dirty="0"/>
           </a:p>
         </p:txBody>
       </p:sp>
     </p:spTree>
     <p:extLst>
       <p:ext uri="{BB962C8B-B14F-4D97-AF65-F5344CB8AC3E}">
-        <p14:creationId xmlns:p14="http://schemas.microsoft.com/office/powerpoint/2010/main" val="2962102763"/>
+        <p14:creationId xmlns:p14="http://schemas.microsoft.com/office/powerpoint/2010/main" val="50926404"/>
       </p:ext>
     </p:extLst>
   </p:cSld>
@@ -1294,8 +1301,8 @@
         </p:nvSpPr>
         <p:spPr>
           <a:xfrm>
-            <a:off x="3119437" y="1709738"/>
-            <a:ext cx="39433500" cy="2852737"/>
+            <a:off x="3493770" y="1709738"/>
+            <a:ext cx="44165520" cy="2852737"/>
           </a:xfrm>
         </p:spPr>
         <p:txBody>
@@ -1326,8 +1333,8 @@
         </p:nvSpPr>
         <p:spPr>
           <a:xfrm>
-            <a:off x="3119437" y="4589464"/>
-            <a:ext cx="39433500" cy="1500187"/>
+            <a:off x="3493770" y="4589464"/>
+            <a:ext cx="44165520" cy="1500187"/>
           </a:xfrm>
         </p:spPr>
         <p:txBody>
@@ -1450,9 +1457,9 @@
           <a:p>
             <a:fld id="{FAC548D3-0433-7442-8CA6-6A33DD5FB3B5}" type="datetimeFigureOut">
               <a:rPr lang="en-US" smtClean="0"/>
-              <a:t>6/15/25</a:t>
+              <a:t>6/28/26</a:t>
             </a:fld>
-            <a:endParaRPr lang="en-US"/>
+            <a:endParaRPr lang="en-US" dirty="0"/>
           </a:p>
         </p:txBody>
       </p:sp>
@@ -1471,7 +1478,7 @@
           <a:bodyPr/>
           <a:lstStyle/>
           <a:p>
-            <a:endParaRPr lang="en-US"/>
+            <a:endParaRPr lang="en-US" dirty="0"/>
           </a:p>
         </p:txBody>
       </p:sp>
@@ -1494,14 +1501,14 @@
               <a:rPr lang="en-US" smtClean="0"/>
               <a:t>‹#›</a:t>
             </a:fld>
-            <a:endParaRPr lang="en-US"/>
+            <a:endParaRPr lang="en-US" dirty="0"/>
           </a:p>
         </p:txBody>
       </p:sp>
     </p:spTree>
     <p:extLst>
       <p:ext uri="{BB962C8B-B14F-4D97-AF65-F5344CB8AC3E}">
-        <p14:creationId xmlns:p14="http://schemas.microsoft.com/office/powerpoint/2010/main" val="1845591523"/>
+        <p14:creationId xmlns:p14="http://schemas.microsoft.com/office/powerpoint/2010/main" val="71466401"/>
       </p:ext>
     </p:extLst>
   </p:cSld>
@@ -1563,8 +1570,8 @@
         </p:nvSpPr>
         <p:spPr>
           <a:xfrm>
-            <a:off x="3143250" y="1825625"/>
-            <a:ext cx="19431000" cy="4351338"/>
+            <a:off x="3520440" y="1825625"/>
+            <a:ext cx="21762720" cy="4351338"/>
           </a:xfrm>
         </p:spPr>
         <p:txBody>
@@ -1620,8 +1627,8 @@
         </p:nvSpPr>
         <p:spPr>
           <a:xfrm>
-            <a:off x="23145750" y="1825625"/>
-            <a:ext cx="19431000" cy="4351338"/>
+            <a:off x="25923240" y="1825625"/>
+            <a:ext cx="21762720" cy="4351338"/>
           </a:xfrm>
         </p:spPr>
         <p:txBody>
@@ -1682,9 +1689,9 @@
           <a:p>
             <a:fld id="{FAC548D3-0433-7442-8CA6-6A33DD5FB3B5}" type="datetimeFigureOut">
               <a:rPr lang="en-US" smtClean="0"/>
-              <a:t>6/15/25</a:t>
+              <a:t>6/28/26</a:t>
             </a:fld>
-            <a:endParaRPr lang="en-US"/>
+            <a:endParaRPr lang="en-US" dirty="0"/>
           </a:p>
         </p:txBody>
       </p:sp>
@@ -1703,7 +1710,7 @@
           <a:bodyPr/>
           <a:lstStyle/>
           <a:p>
-            <a:endParaRPr lang="en-US"/>
+            <a:endParaRPr lang="en-US" dirty="0"/>
           </a:p>
         </p:txBody>
       </p:sp>
@@ -1726,14 +1733,14 @@
               <a:rPr lang="en-US" smtClean="0"/>
               <a:t>‹#›</a:t>
             </a:fld>
-            <a:endParaRPr lang="en-US"/>
+            <a:endParaRPr lang="en-US" dirty="0"/>
           </a:p>
         </p:txBody>
       </p:sp>
     </p:spTree>
     <p:extLst>
       <p:ext uri="{BB962C8B-B14F-4D97-AF65-F5344CB8AC3E}">
-        <p14:creationId xmlns:p14="http://schemas.microsoft.com/office/powerpoint/2010/main" val="1136973111"/>
+        <p14:creationId xmlns:p14="http://schemas.microsoft.com/office/powerpoint/2010/main" val="2932204106"/>
       </p:ext>
     </p:extLst>
   </p:cSld>
@@ -1772,8 +1779,8 @@
         </p:nvSpPr>
         <p:spPr>
           <a:xfrm>
-            <a:off x="3149205" y="365126"/>
-            <a:ext cx="39433500" cy="1325563"/>
+            <a:off x="3527110" y="365126"/>
+            <a:ext cx="44165520" cy="1325563"/>
           </a:xfrm>
         </p:spPr>
         <p:txBody>
@@ -1800,8 +1807,8 @@
         </p:nvSpPr>
         <p:spPr>
           <a:xfrm>
-            <a:off x="3149207" y="1681163"/>
-            <a:ext cx="19341701" cy="823912"/>
+            <a:off x="3527112" y="1681163"/>
+            <a:ext cx="21662705" cy="823912"/>
           </a:xfrm>
         </p:spPr>
         <p:txBody>
@@ -1865,8 +1872,8 @@
         </p:nvSpPr>
         <p:spPr>
           <a:xfrm>
-            <a:off x="3149207" y="2505075"/>
-            <a:ext cx="19341701" cy="3684588"/>
+            <a:off x="3527112" y="2505075"/>
+            <a:ext cx="21662705" cy="3684588"/>
           </a:xfrm>
         </p:spPr>
         <p:txBody>
@@ -1922,8 +1929,8 @@
         </p:nvSpPr>
         <p:spPr>
           <a:xfrm>
-            <a:off x="23145750" y="1681163"/>
-            <a:ext cx="19436955" cy="823912"/>
+            <a:off x="25923240" y="1681163"/>
+            <a:ext cx="21769390" cy="823912"/>
           </a:xfrm>
         </p:spPr>
         <p:txBody>
@@ -1987,8 +1994,8 @@
         </p:nvSpPr>
         <p:spPr>
           <a:xfrm>
-            <a:off x="23145750" y="2505075"/>
-            <a:ext cx="19436955" cy="3684588"/>
+            <a:off x="25923240" y="2505075"/>
+            <a:ext cx="21769390" cy="3684588"/>
           </a:xfrm>
         </p:spPr>
         <p:txBody>
@@ -2049,9 +2056,9 @@
           <a:p>
             <a:fld id="{FAC548D3-0433-7442-8CA6-6A33DD5FB3B5}" type="datetimeFigureOut">
               <a:rPr lang="en-US" smtClean="0"/>
-              <a:t>6/15/25</a:t>
+              <a:t>6/28/26</a:t>
             </a:fld>
-            <a:endParaRPr lang="en-US"/>
+            <a:endParaRPr lang="en-US" dirty="0"/>
           </a:p>
         </p:txBody>
       </p:sp>
@@ -2070,7 +2077,7 @@
           <a:bodyPr/>
           <a:lstStyle/>
           <a:p>
-            <a:endParaRPr lang="en-US"/>
+            <a:endParaRPr lang="en-US" dirty="0"/>
           </a:p>
         </p:txBody>
       </p:sp>
@@ -2093,14 +2100,14 @@
               <a:rPr lang="en-US" smtClean="0"/>
               <a:t>‹#›</a:t>
             </a:fld>
-            <a:endParaRPr lang="en-US"/>
+            <a:endParaRPr lang="en-US" dirty="0"/>
           </a:p>
         </p:txBody>
       </p:sp>
     </p:spTree>
     <p:extLst>
       <p:ext uri="{BB962C8B-B14F-4D97-AF65-F5344CB8AC3E}">
-        <p14:creationId xmlns:p14="http://schemas.microsoft.com/office/powerpoint/2010/main" val="819887861"/>
+        <p14:creationId xmlns:p14="http://schemas.microsoft.com/office/powerpoint/2010/main" val="2551628364"/>
       </p:ext>
     </p:extLst>
   </p:cSld>
@@ -2167,9 +2174,9 @@
           <a:p>
             <a:fld id="{FAC548D3-0433-7442-8CA6-6A33DD5FB3B5}" type="datetimeFigureOut">
               <a:rPr lang="en-US" smtClean="0"/>
-              <a:t>6/15/25</a:t>
+              <a:t>6/28/26</a:t>
             </a:fld>
-            <a:endParaRPr lang="en-US"/>
+            <a:endParaRPr lang="en-US" dirty="0"/>
           </a:p>
         </p:txBody>
       </p:sp>
@@ -2188,7 +2195,7 @@
           <a:bodyPr/>
           <a:lstStyle/>
           <a:p>
-            <a:endParaRPr lang="en-US"/>
+            <a:endParaRPr lang="en-US" dirty="0"/>
           </a:p>
         </p:txBody>
       </p:sp>
@@ -2211,14 +2218,14 @@
               <a:rPr lang="en-US" smtClean="0"/>
               <a:t>‹#›</a:t>
             </a:fld>
-            <a:endParaRPr lang="en-US"/>
+            <a:endParaRPr lang="en-US" dirty="0"/>
           </a:p>
         </p:txBody>
       </p:sp>
     </p:spTree>
     <p:extLst>
       <p:ext uri="{BB962C8B-B14F-4D97-AF65-F5344CB8AC3E}">
-        <p14:creationId xmlns:p14="http://schemas.microsoft.com/office/powerpoint/2010/main" val="1132943852"/>
+        <p14:creationId xmlns:p14="http://schemas.microsoft.com/office/powerpoint/2010/main" val="1500232726"/>
       </p:ext>
     </p:extLst>
   </p:cSld>
@@ -2262,9 +2269,9 @@
           <a:p>
             <a:fld id="{FAC548D3-0433-7442-8CA6-6A33DD5FB3B5}" type="datetimeFigureOut">
               <a:rPr lang="en-US" smtClean="0"/>
-              <a:t>6/15/25</a:t>
+              <a:t>6/28/26</a:t>
             </a:fld>
-            <a:endParaRPr lang="en-US"/>
+            <a:endParaRPr lang="en-US" dirty="0"/>
           </a:p>
         </p:txBody>
       </p:sp>
@@ -2283,7 +2290,7 @@
           <a:bodyPr/>
           <a:lstStyle/>
           <a:p>
-            <a:endParaRPr lang="en-US"/>
+            <a:endParaRPr lang="en-US" dirty="0"/>
           </a:p>
         </p:txBody>
       </p:sp>
@@ -2306,14 +2313,14 @@
               <a:rPr lang="en-US" smtClean="0"/>
               <a:t>‹#›</a:t>
             </a:fld>
-            <a:endParaRPr lang="en-US"/>
+            <a:endParaRPr lang="en-US" dirty="0"/>
           </a:p>
         </p:txBody>
       </p:sp>
     </p:spTree>
     <p:extLst>
       <p:ext uri="{BB962C8B-B14F-4D97-AF65-F5344CB8AC3E}">
-        <p14:creationId xmlns:p14="http://schemas.microsoft.com/office/powerpoint/2010/main" val="4135384471"/>
+        <p14:creationId xmlns:p14="http://schemas.microsoft.com/office/powerpoint/2010/main" val="4030389150"/>
       </p:ext>
     </p:extLst>
   </p:cSld>
@@ -2352,8 +2359,8 @@
         </p:nvSpPr>
         <p:spPr>
           <a:xfrm>
-            <a:off x="3149207" y="457200"/>
-            <a:ext cx="14745889" cy="1600200"/>
+            <a:off x="3527112" y="457200"/>
+            <a:ext cx="16515395" cy="1600200"/>
           </a:xfrm>
         </p:spPr>
         <p:txBody>
@@ -2384,8 +2391,8 @@
         </p:nvSpPr>
         <p:spPr>
           <a:xfrm>
-            <a:off x="19436955" y="987426"/>
-            <a:ext cx="23145750" cy="4873625"/>
+            <a:off x="21769390" y="987426"/>
+            <a:ext cx="25923240" cy="4873625"/>
           </a:xfrm>
         </p:spPr>
         <p:txBody>
@@ -2469,8 +2476,8 @@
         </p:nvSpPr>
         <p:spPr>
           <a:xfrm>
-            <a:off x="3149207" y="2057400"/>
-            <a:ext cx="14745889" cy="3811588"/>
+            <a:off x="3527112" y="2057400"/>
+            <a:ext cx="16515395" cy="3811588"/>
           </a:xfrm>
         </p:spPr>
         <p:txBody>
@@ -2539,9 +2546,9 @@
           <a:p>
             <a:fld id="{FAC548D3-0433-7442-8CA6-6A33DD5FB3B5}" type="datetimeFigureOut">
               <a:rPr lang="en-US" smtClean="0"/>
-              <a:t>6/15/25</a:t>
+              <a:t>6/28/26</a:t>
             </a:fld>
-            <a:endParaRPr lang="en-US"/>
+            <a:endParaRPr lang="en-US" dirty="0"/>
           </a:p>
         </p:txBody>
       </p:sp>
@@ -2560,7 +2567,7 @@
           <a:bodyPr/>
           <a:lstStyle/>
           <a:p>
-            <a:endParaRPr lang="en-US"/>
+            <a:endParaRPr lang="en-US" dirty="0"/>
           </a:p>
         </p:txBody>
       </p:sp>
@@ -2583,14 +2590,14 @@
               <a:rPr lang="en-US" smtClean="0"/>
               <a:t>‹#›</a:t>
             </a:fld>
-            <a:endParaRPr lang="en-US"/>
+            <a:endParaRPr lang="en-US" dirty="0"/>
           </a:p>
         </p:txBody>
       </p:sp>
     </p:spTree>
     <p:extLst>
       <p:ext uri="{BB962C8B-B14F-4D97-AF65-F5344CB8AC3E}">
-        <p14:creationId xmlns:p14="http://schemas.microsoft.com/office/powerpoint/2010/main" val="2426648438"/>
+        <p14:creationId xmlns:p14="http://schemas.microsoft.com/office/powerpoint/2010/main" val="2186805049"/>
       </p:ext>
     </p:extLst>
   </p:cSld>
@@ -2629,8 +2636,8 @@
         </p:nvSpPr>
         <p:spPr>
           <a:xfrm>
-            <a:off x="3149207" y="457200"/>
-            <a:ext cx="14745889" cy="1600200"/>
+            <a:off x="3527112" y="457200"/>
+            <a:ext cx="16515395" cy="1600200"/>
           </a:xfrm>
         </p:spPr>
         <p:txBody>
@@ -2661,8 +2668,8 @@
         </p:nvSpPr>
         <p:spPr>
           <a:xfrm>
-            <a:off x="19436955" y="987426"/>
-            <a:ext cx="23145750" cy="4873625"/>
+            <a:off x="21769390" y="987426"/>
+            <a:ext cx="25923240" cy="4873625"/>
           </a:xfrm>
         </p:spPr>
         <p:txBody>
@@ -2707,10 +2714,9 @@
           </a:lstStyle>
           <a:p>
             <a:r>
-              <a:rPr lang="en-US"/>
+              <a:rPr lang="en-US" dirty="0"/>
               <a:t>Click icon to add picture</a:t>
             </a:r>
-            <a:endParaRPr lang="en-US" dirty="0"/>
           </a:p>
         </p:txBody>
       </p:sp>
@@ -2726,8 +2732,8 @@
         </p:nvSpPr>
         <p:spPr>
           <a:xfrm>
-            <a:off x="3149207" y="2057400"/>
-            <a:ext cx="14745889" cy="3811588"/>
+            <a:off x="3527112" y="2057400"/>
+            <a:ext cx="16515395" cy="3811588"/>
           </a:xfrm>
         </p:spPr>
         <p:txBody>
@@ -2796,9 +2802,9 @@
           <a:p>
             <a:fld id="{FAC548D3-0433-7442-8CA6-6A33DD5FB3B5}" type="datetimeFigureOut">
               <a:rPr lang="en-US" smtClean="0"/>
-              <a:t>6/15/25</a:t>
+              <a:t>6/28/26</a:t>
             </a:fld>
-            <a:endParaRPr lang="en-US"/>
+            <a:endParaRPr lang="en-US" dirty="0"/>
           </a:p>
         </p:txBody>
       </p:sp>
@@ -2817,7 +2823,7 @@
           <a:bodyPr/>
           <a:lstStyle/>
           <a:p>
-            <a:endParaRPr lang="en-US"/>
+            <a:endParaRPr lang="en-US" dirty="0"/>
           </a:p>
         </p:txBody>
       </p:sp>
@@ -2840,14 +2846,14 @@
               <a:rPr lang="en-US" smtClean="0"/>
               <a:t>‹#›</a:t>
             </a:fld>
-            <a:endParaRPr lang="en-US"/>
+            <a:endParaRPr lang="en-US" dirty="0"/>
           </a:p>
         </p:txBody>
       </p:sp>
     </p:spTree>
     <p:extLst>
       <p:ext uri="{BB962C8B-B14F-4D97-AF65-F5344CB8AC3E}">
-        <p14:creationId xmlns:p14="http://schemas.microsoft.com/office/powerpoint/2010/main" val="340866333"/>
+        <p14:creationId xmlns:p14="http://schemas.microsoft.com/office/powerpoint/2010/main" val="815697702"/>
       </p:ext>
     </p:extLst>
   </p:cSld>
@@ -2891,8 +2897,8 @@
         </p:nvSpPr>
         <p:spPr>
           <a:xfrm>
-            <a:off x="3143250" y="365126"/>
-            <a:ext cx="39433500" cy="1325563"/>
+            <a:off x="3520440" y="365126"/>
+            <a:ext cx="44165520" cy="1325563"/>
           </a:xfrm>
           <a:prstGeom prst="rect">
             <a:avLst/>
@@ -2924,8 +2930,8 @@
         </p:nvSpPr>
         <p:spPr>
           <a:xfrm>
-            <a:off x="3143250" y="1825625"/>
-            <a:ext cx="39433500" cy="4351338"/>
+            <a:off x="3520440" y="1825625"/>
+            <a:ext cx="44165520" cy="4351338"/>
           </a:xfrm>
           <a:prstGeom prst="rect">
             <a:avLst/>
@@ -2986,8 +2992,8 @@
         </p:nvSpPr>
         <p:spPr>
           <a:xfrm>
-            <a:off x="3143250" y="6356351"/>
-            <a:ext cx="10287000" cy="365125"/>
+            <a:off x="3520440" y="6356351"/>
+            <a:ext cx="11521440" cy="365125"/>
           </a:xfrm>
           <a:prstGeom prst="rect">
             <a:avLst/>
@@ -3009,9 +3015,9 @@
           <a:p>
             <a:fld id="{FAC548D3-0433-7442-8CA6-6A33DD5FB3B5}" type="datetimeFigureOut">
               <a:rPr lang="en-US" smtClean="0"/>
-              <a:t>6/15/25</a:t>
+              <a:t>6/28/26</a:t>
             </a:fld>
-            <a:endParaRPr lang="en-US"/>
+            <a:endParaRPr lang="en-US" dirty="0"/>
           </a:p>
         </p:txBody>
       </p:sp>
@@ -3027,8 +3033,8 @@
         </p:nvSpPr>
         <p:spPr>
           <a:xfrm>
-            <a:off x="15144750" y="6356351"/>
-            <a:ext cx="15430500" cy="365125"/>
+            <a:off x="16962120" y="6356351"/>
+            <a:ext cx="17282160" cy="365125"/>
           </a:xfrm>
           <a:prstGeom prst="rect">
             <a:avLst/>
@@ -3048,7 +3054,7 @@
             </a:lvl1pPr>
           </a:lstStyle>
           <a:p>
-            <a:endParaRPr lang="en-US"/>
+            <a:endParaRPr lang="en-US" dirty="0"/>
           </a:p>
         </p:txBody>
       </p:sp>
@@ -3064,8 +3070,8 @@
         </p:nvSpPr>
         <p:spPr>
           <a:xfrm>
-            <a:off x="32289750" y="6356351"/>
-            <a:ext cx="10287000" cy="365125"/>
+            <a:off x="36164520" y="6356351"/>
+            <a:ext cx="11521440" cy="365125"/>
           </a:xfrm>
           <a:prstGeom prst="rect">
             <a:avLst/>
@@ -3089,30 +3095,30 @@
               <a:rPr lang="en-US" smtClean="0"/>
               <a:t>‹#›</a:t>
             </a:fld>
-            <a:endParaRPr lang="en-US"/>
+            <a:endParaRPr lang="en-US" dirty="0"/>
           </a:p>
         </p:txBody>
       </p:sp>
     </p:spTree>
     <p:extLst>
       <p:ext uri="{BB962C8B-B14F-4D97-AF65-F5344CB8AC3E}">
-        <p14:creationId xmlns:p14="http://schemas.microsoft.com/office/powerpoint/2010/main" val="2618655865"/>
+        <p14:creationId xmlns:p14="http://schemas.microsoft.com/office/powerpoint/2010/main" val="353529611"/>
       </p:ext>
     </p:extLst>
   </p:cSld>
   <p:clrMap bg1="lt1" tx1="dk1" bg2="lt2" tx2="dk2" accent1="accent1" accent2="accent2" accent3="accent3" accent4="accent4" accent5="accent5" accent6="accent6" hlink="hlink" folHlink="folHlink"/>
   <p:sldLayoutIdLst>
-    <p:sldLayoutId id="2147483685" r:id="rId1"/>
-    <p:sldLayoutId id="2147483686" r:id="rId2"/>
-    <p:sldLayoutId id="2147483687" r:id="rId3"/>
-    <p:sldLayoutId id="2147483688" r:id="rId4"/>
-    <p:sldLayoutId id="2147483689" r:id="rId5"/>
-    <p:sldLayoutId id="2147483690" r:id="rId6"/>
-    <p:sldLayoutId id="2147483691" r:id="rId7"/>
-    <p:sldLayoutId id="2147483692" r:id="rId8"/>
-    <p:sldLayoutId id="2147483693" r:id="rId9"/>
-    <p:sldLayoutId id="2147483694" r:id="rId10"/>
-    <p:sldLayoutId id="2147483695" r:id="rId11"/>
+    <p:sldLayoutId id="2147483697" r:id="rId1"/>
+    <p:sldLayoutId id="2147483698" r:id="rId2"/>
+    <p:sldLayoutId id="2147483699" r:id="rId3"/>
+    <p:sldLayoutId id="2147483700" r:id="rId4"/>
+    <p:sldLayoutId id="2147483701" r:id="rId5"/>
+    <p:sldLayoutId id="2147483702" r:id="rId6"/>
+    <p:sldLayoutId id="2147483703" r:id="rId7"/>
+    <p:sldLayoutId id="2147483704" r:id="rId8"/>
+    <p:sldLayoutId id="2147483705" r:id="rId9"/>
+    <p:sldLayoutId id="2147483706" r:id="rId10"/>
+    <p:sldLayoutId id="2147483707" r:id="rId11"/>
   </p:sldLayoutIdLst>
   <p:txStyles>
     <p:titleStyle>
@@ -3430,7 +3436,7 @@
         </p:nvSpPr>
         <p:spPr>
           <a:xfrm>
-            <a:off x="10491553" y="4257667"/>
+            <a:off x="10423811" y="4257667"/>
             <a:ext cx="988106" cy="848504"/>
           </a:xfrm>
           <a:prstGeom prst="rect">
@@ -3516,7 +3522,7 @@
         </p:nvSpPr>
         <p:spPr>
           <a:xfrm>
-            <a:off x="10504597" y="5315431"/>
+            <a:off x="10436855" y="5315431"/>
             <a:ext cx="988106" cy="848504"/>
           </a:xfrm>
           <a:prstGeom prst="rect">
@@ -3604,7 +3610,7 @@
         </p:nvSpPr>
         <p:spPr>
           <a:xfrm>
-            <a:off x="291923" y="447139"/>
+            <a:off x="224181" y="447139"/>
             <a:ext cx="12396520" cy="437152"/>
           </a:xfrm>
         </p:spPr>
@@ -3658,7 +3664,7 @@
         </p:nvSpPr>
         <p:spPr>
           <a:xfrm>
-            <a:off x="115713" y="911671"/>
+            <a:off x="47971" y="911671"/>
             <a:ext cx="5846756" cy="1166946"/>
           </a:xfrm>
           <a:prstGeom prst="rect">
@@ -3721,7 +3727,7 @@
         </p:nvSpPr>
         <p:spPr>
           <a:xfrm>
-            <a:off x="291924" y="3663677"/>
+            <a:off x="224183" y="3663677"/>
             <a:ext cx="11631049" cy="753940"/>
           </a:xfrm>
           <a:prstGeom prst="rect">
@@ -3796,7 +3802,7 @@
         </p:nvSpPr>
         <p:spPr>
           <a:xfrm>
-            <a:off x="613716" y="4984915"/>
+            <a:off x="545975" y="4984916"/>
             <a:ext cx="1913919" cy="753939"/>
           </a:xfrm>
           <a:prstGeom prst="rect">
@@ -3863,7 +3869,7 @@
         </p:nvSpPr>
         <p:spPr>
           <a:xfrm>
-            <a:off x="11212251" y="4345020"/>
+            <a:off x="11144510" y="4345020"/>
             <a:ext cx="175925" cy="321296"/>
           </a:xfrm>
           <a:prstGeom prst="rect">
@@ -3899,7 +3905,7 @@
           <a:lstStyle/>
           <a:p>
             <a:pPr algn="ctr"/>
-            <a:endParaRPr lang="en-US"/>
+            <a:endParaRPr lang="en-US" dirty="0"/>
           </a:p>
         </p:txBody>
       </p:sp>
@@ -3917,7 +3923,7 @@
         </p:nvSpPr>
         <p:spPr>
           <a:xfrm>
-            <a:off x="11204179" y="5050017"/>
+            <a:off x="11136438" y="5050017"/>
             <a:ext cx="175925" cy="321296"/>
           </a:xfrm>
           <a:prstGeom prst="rect">
@@ -3953,7 +3959,7 @@
           <a:lstStyle/>
           <a:p>
             <a:pPr algn="ctr"/>
-            <a:endParaRPr lang="en-US"/>
+            <a:endParaRPr lang="en-US" dirty="0"/>
           </a:p>
         </p:txBody>
       </p:sp>
@@ -3971,7 +3977,7 @@
         </p:nvSpPr>
         <p:spPr>
           <a:xfrm>
-            <a:off x="10655545" y="4685362"/>
+            <a:off x="10587804" y="4685362"/>
             <a:ext cx="175925" cy="321296"/>
           </a:xfrm>
           <a:prstGeom prst="rect">
@@ -4007,7 +4013,7 @@
           <a:lstStyle/>
           <a:p>
             <a:pPr algn="ctr"/>
-            <a:endParaRPr lang="en-US"/>
+            <a:endParaRPr lang="en-US" dirty="0"/>
           </a:p>
         </p:txBody>
       </p:sp>
@@ -4025,7 +4031,7 @@
         </p:nvSpPr>
         <p:spPr>
           <a:xfrm>
-            <a:off x="10945582" y="5745415"/>
+            <a:off x="10877841" y="5745415"/>
             <a:ext cx="175925" cy="321296"/>
           </a:xfrm>
           <a:prstGeom prst="rect">
@@ -4061,7 +4067,7 @@
           <a:lstStyle/>
           <a:p>
             <a:pPr algn="ctr"/>
-            <a:endParaRPr lang="en-US"/>
+            <a:endParaRPr lang="en-US" dirty="0"/>
           </a:p>
         </p:txBody>
       </p:sp>
@@ -4079,7 +4085,7 @@
         </p:nvSpPr>
         <p:spPr>
           <a:xfrm>
-            <a:off x="3122026" y="4852279"/>
+            <a:off x="3054284" y="4852279"/>
             <a:ext cx="1167178" cy="923330"/>
           </a:xfrm>
           <a:prstGeom prst="rect">
@@ -4119,7 +4125,7 @@
         </p:nvSpPr>
         <p:spPr>
           <a:xfrm>
-            <a:off x="6071110" y="1241953"/>
+            <a:off x="6003369" y="1241953"/>
             <a:ext cx="1001925" cy="923330"/>
           </a:xfrm>
           <a:prstGeom prst="rect">
@@ -4161,7 +4167,7 @@
         </p:nvSpPr>
         <p:spPr>
           <a:xfrm>
-            <a:off x="7966342" y="921547"/>
+            <a:off x="7898600" y="921547"/>
             <a:ext cx="2406254" cy="1813026"/>
           </a:xfrm>
           <a:prstGeom prst="rect">
@@ -4264,7 +4270,7 @@
         </p:nvSpPr>
         <p:spPr>
           <a:xfrm>
-            <a:off x="10097053" y="801256"/>
+            <a:off x="10029311" y="801257"/>
             <a:ext cx="2497180" cy="1908615"/>
           </a:xfrm>
           <a:prstGeom prst="rect">
@@ -4353,7 +4359,7 @@
         </p:nvSpPr>
         <p:spPr>
           <a:xfrm rot="2404961">
-            <a:off x="12447964" y="2016235"/>
+            <a:off x="12654543" y="2016235"/>
             <a:ext cx="978291" cy="923330"/>
           </a:xfrm>
           <a:prstGeom prst="rect">
@@ -4388,7 +4394,7 @@
         </p:nvSpPr>
         <p:spPr>
           <a:xfrm rot="19374242">
-            <a:off x="12422235" y="4403760"/>
+            <a:off x="12628814" y="4403760"/>
             <a:ext cx="978291" cy="923330"/>
           </a:xfrm>
           <a:prstGeom prst="rect">
@@ -4428,7 +4434,7 @@
         </p:nvSpPr>
         <p:spPr>
           <a:xfrm>
-            <a:off x="19386651" y="2947705"/>
+            <a:off x="19593229" y="2947705"/>
             <a:ext cx="1024760" cy="923330"/>
           </a:xfrm>
           <a:prstGeom prst="rect">
@@ -4470,7 +4476,7 @@
         </p:nvSpPr>
         <p:spPr>
           <a:xfrm>
-            <a:off x="23390088" y="1005615"/>
+            <a:off x="24465346" y="1005615"/>
             <a:ext cx="4986208" cy="753940"/>
           </a:xfrm>
           <a:prstGeom prst="rect">
@@ -4527,7 +4533,7 @@
         </p:nvSpPr>
         <p:spPr>
           <a:xfrm>
-            <a:off x="33153420" y="2959262"/>
+            <a:off x="37607544" y="3238064"/>
             <a:ext cx="1024760" cy="923330"/>
           </a:xfrm>
           <a:prstGeom prst="rect">
@@ -4567,7 +4573,7 @@
         </p:nvSpPr>
         <p:spPr>
           <a:xfrm>
-            <a:off x="21800599" y="3088596"/>
+            <a:off x="22383312" y="3233983"/>
             <a:ext cx="1024760" cy="923330"/>
           </a:xfrm>
           <a:prstGeom prst="rect">
@@ -4595,10 +4601,10 @@
       </p:sp>
       <p:sp>
         <p:nvSpPr>
-          <p:cNvPr id="84" name="Title 1">
+          <p:cNvPr id="85" name="Title 1">
             <a:extLst>
               <a:ext uri="{FF2B5EF4-FFF2-40B4-BE49-F238E27FC236}">
-                <a16:creationId xmlns:a16="http://schemas.microsoft.com/office/drawing/2014/main" id="{B052ED0F-787B-D86B-98C0-074C330B0AC1}"/>
+                <a16:creationId xmlns:a16="http://schemas.microsoft.com/office/drawing/2014/main" id="{F886E484-3F62-DBE4-20D1-337BA88EE12D}"/>
               </a:ext>
             </a:extLst>
           </p:cNvPr>
@@ -4609,8 +4615,8 @@
         </p:nvSpPr>
         <p:spPr>
           <a:xfrm>
-            <a:off x="35103143" y="2140151"/>
-            <a:ext cx="4198926" cy="4332902"/>
+            <a:off x="39308898" y="707465"/>
+            <a:ext cx="4511161" cy="1046901"/>
           </a:xfrm>
           <a:prstGeom prst="rect">
             <a:avLst/>
@@ -4645,171 +4651,13 @@
                 <a:spcPts val="1200"/>
               </a:spcAft>
             </a:pPr>
-            <a:endParaRPr lang="en-US" sz="4800" u="sng" dirty="0">
-              <a:latin typeface="Linux Libertine" panose="02000503000000000000" pitchFamily="2" charset="0"/>
-              <a:ea typeface="Linux Libertine" panose="02000503000000000000" pitchFamily="2" charset="0"/>
-              <a:cs typeface="Linux Libertine" panose="02000503000000000000" pitchFamily="2" charset="0"/>
-            </a:endParaRPr>
-          </a:p>
-          <a:p>
-            <a:pPr marL="914400" indent="-914400" algn="l">
-              <a:spcAft>
-                <a:spcPts val="1200"/>
-              </a:spcAft>
-              <a:buFont typeface="+mj-lt"/>
-              <a:buAutoNum type="arabicPeriod"/>
-            </a:pPr>
-            <a:r>
-              <a:rPr lang="en-US" sz="4500" dirty="0">
-                <a:latin typeface="Linux Libertine" panose="02000503000000000000" pitchFamily="2" charset="0"/>
-                <a:ea typeface="Linux Libertine" panose="02000503000000000000" pitchFamily="2" charset="0"/>
-                <a:cs typeface="Linux Libertine" panose="02000503000000000000" pitchFamily="2" charset="0"/>
-              </a:rPr>
-              <a:t> </a:t>
-            </a:r>
-            <a:r>
-              <a:rPr lang="en-US" sz="4500" dirty="0">
-                <a:latin typeface="JetBrains Mono" panose="02000009000000000000" pitchFamily="49" charset="0"/>
-                <a:ea typeface="JetBrains Mono" panose="02000009000000000000" pitchFamily="49" charset="0"/>
-                <a:cs typeface="JetBrains Mono" panose="02000009000000000000" pitchFamily="49" charset="0"/>
-              </a:rPr>
-              <a:t>( ( ) )</a:t>
-            </a:r>
-          </a:p>
-          <a:p>
-            <a:pPr marL="914400" indent="-914400" algn="l">
-              <a:spcAft>
-                <a:spcPts val="1200"/>
-              </a:spcAft>
-              <a:buFont typeface="+mj-lt"/>
-              <a:buAutoNum type="arabicPeriod"/>
-            </a:pPr>
-            <a:r>
-              <a:rPr lang="en-US" sz="4500" dirty="0">
-                <a:latin typeface="Linux Libertine" panose="02000503000000000000" pitchFamily="2" charset="0"/>
-                <a:ea typeface="Linux Libertine" panose="02000503000000000000" pitchFamily="2" charset="0"/>
-                <a:cs typeface="Linux Libertine" panose="02000503000000000000" pitchFamily="2" charset="0"/>
-              </a:rPr>
-              <a:t> </a:t>
-            </a:r>
-            <a:r>
-              <a:rPr lang="en-US" sz="4500" dirty="0">
-                <a:latin typeface="JetBrains Mono" panose="02000009000000000000" pitchFamily="49" charset="0"/>
-                <a:ea typeface="JetBrains Mono" panose="02000009000000000000" pitchFamily="49" charset="0"/>
-                <a:cs typeface="JetBrains Mono" panose="02000009000000000000" pitchFamily="49" charset="0"/>
-              </a:rPr>
-              <a:t>( ) ( )</a:t>
-            </a:r>
-          </a:p>
-          <a:p>
-            <a:pPr marL="914400" indent="-914400" algn="l">
-              <a:spcAft>
-                <a:spcPts val="1200"/>
-              </a:spcAft>
-              <a:buFont typeface="+mj-lt"/>
-              <a:buAutoNum type="arabicPeriod"/>
-            </a:pPr>
-            <a:r>
-              <a:rPr lang="en-US" sz="4500" dirty="0">
-                <a:latin typeface="Linux Libertine" panose="02000503000000000000" pitchFamily="2" charset="0"/>
-                <a:ea typeface="Linux Libertine" panose="02000503000000000000" pitchFamily="2" charset="0"/>
-                <a:cs typeface="Linux Libertine" panose="02000503000000000000" pitchFamily="2" charset="0"/>
-              </a:rPr>
-              <a:t> </a:t>
-            </a:r>
-            <a:r>
-              <a:rPr lang="en-US" sz="4500" dirty="0">
-                <a:latin typeface="JetBrains Mono" panose="02000009000000000000" pitchFamily="49" charset="0"/>
-                <a:ea typeface="JetBrains Mono" panose="02000009000000000000" pitchFamily="49" charset="0"/>
-                <a:cs typeface="JetBrains Mono" panose="02000009000000000000" pitchFamily="49" charset="0"/>
-              </a:rPr>
-              <a:t>( )</a:t>
-            </a:r>
-          </a:p>
-          <a:p>
-            <a:pPr algn="l">
-              <a:spcAft>
-                <a:spcPts val="1200"/>
-              </a:spcAft>
-            </a:pPr>
-            <a:r>
-              <a:rPr lang="en-US" sz="4500" dirty="0">
-                <a:latin typeface="JetBrains Mono" panose="02000009000000000000" pitchFamily="49" charset="0"/>
-                <a:ea typeface="JetBrains Mono" panose="02000009000000000000" pitchFamily="49" charset="0"/>
-                <a:cs typeface="JetBrains Mono" panose="02000009000000000000" pitchFamily="49" charset="0"/>
-              </a:rPr>
-              <a:t>…</a:t>
-            </a:r>
-          </a:p>
-          <a:p>
-            <a:pPr algn="l"/>
-            <a:endParaRPr lang="en-US" sz="4500" u="sng" dirty="0">
-              <a:latin typeface="Linux Libertine" panose="02000503000000000000" pitchFamily="2" charset="0"/>
-              <a:ea typeface="Linux Libertine" panose="02000503000000000000" pitchFamily="2" charset="0"/>
-              <a:cs typeface="Linux Libertine" panose="02000503000000000000" pitchFamily="2" charset="0"/>
-            </a:endParaRPr>
-          </a:p>
-        </p:txBody>
-      </p:sp>
-      <p:sp>
-        <p:nvSpPr>
-          <p:cNvPr id="85" name="Title 1">
-            <a:extLst>
-              <a:ext uri="{FF2B5EF4-FFF2-40B4-BE49-F238E27FC236}">
-                <a16:creationId xmlns:a16="http://schemas.microsoft.com/office/drawing/2014/main" id="{F886E484-3F62-DBE4-20D1-337BA88EE12D}"/>
-              </a:ext>
-            </a:extLst>
-          </p:cNvPr>
-          <p:cNvSpPr txBox="1">
-            <a:spLocks/>
-          </p:cNvSpPr>
-          <p:nvPr/>
-        </p:nvSpPr>
-        <p:spPr>
-          <a:xfrm>
-            <a:off x="34785447" y="1095226"/>
-            <a:ext cx="4511161" cy="1046901"/>
-          </a:xfrm>
-          <a:prstGeom prst="rect">
-            <a:avLst/>
-          </a:prstGeom>
-        </p:spPr>
-        <p:txBody>
-          <a:bodyPr vert="horz" lIns="91440" tIns="45720" rIns="91440" bIns="45720" rtlCol="0" anchor="b">
-            <a:normAutofit/>
-          </a:bodyPr>
-          <a:lstStyle>
-            <a:lvl1pPr algn="ctr" defTabSz="914400" rtl="0" eaLnBrk="1" latinLnBrk="0" hangingPunct="1">
-              <a:lnSpc>
-                <a:spcPct val="90000"/>
-              </a:lnSpc>
-              <a:spcBef>
-                <a:spcPct val="0"/>
-              </a:spcBef>
-              <a:buNone/>
-              <a:defRPr sz="6000" kern="1200">
-                <a:solidFill>
-                  <a:schemeClr val="tx1"/>
-                </a:solidFill>
-                <a:latin typeface="+mj-lt"/>
-                <a:ea typeface="+mj-ea"/>
-                <a:cs typeface="+mj-cs"/>
-              </a:defRPr>
-            </a:lvl1pPr>
-          </a:lstStyle>
-          <a:p>
-            <a:pPr algn="l">
-              <a:spcAft>
-                <a:spcPts val="1200"/>
-              </a:spcAft>
-            </a:pPr>
             <a:r>
               <a:rPr lang="en-US" sz="4500" u="sng" dirty="0">
                 <a:latin typeface="Linux Libertine" panose="02000503000000000000" pitchFamily="2" charset="0"/>
                 <a:ea typeface="Linux Libertine" panose="02000503000000000000" pitchFamily="2" charset="0"/>
                 <a:cs typeface="Linux Libertine" panose="02000503000000000000" pitchFamily="2" charset="0"/>
               </a:rPr>
-              <a:t>Sampled repairs</a:t>
+              <a:t>LaTeR Reranking</a:t>
             </a:r>
           </a:p>
         </p:txBody>
@@ -4836,7 +4684,7 @@
         </p:blipFill>
         <p:spPr>
           <a:xfrm>
-            <a:off x="4588104" y="4528046"/>
+            <a:off x="4520362" y="4528047"/>
             <a:ext cx="4395724" cy="1756603"/>
           </a:xfrm>
           <a:prstGeom prst="rect">
@@ -4858,7 +4706,7 @@
         </p:nvSpPr>
         <p:spPr>
           <a:xfrm>
-            <a:off x="10672440" y="6112576"/>
+            <a:off x="10604699" y="6112576"/>
             <a:ext cx="175925" cy="321296"/>
           </a:xfrm>
           <a:prstGeom prst="rect">
@@ -4894,7 +4742,7 @@
           <a:lstStyle/>
           <a:p>
             <a:pPr algn="ctr"/>
-            <a:endParaRPr lang="en-US"/>
+            <a:endParaRPr lang="en-US" dirty="0"/>
           </a:p>
         </p:txBody>
       </p:sp>
@@ -4912,7 +4760,7 @@
         </p:nvSpPr>
         <p:spPr>
           <a:xfrm>
-            <a:off x="10459832" y="4334006"/>
+            <a:off x="10392090" y="4334007"/>
             <a:ext cx="1906486" cy="2139047"/>
           </a:xfrm>
           <a:prstGeom prst="rect">
@@ -5094,7 +4942,7 @@
         </p:nvSpPr>
         <p:spPr>
           <a:xfrm>
-            <a:off x="28501790" y="2947705"/>
+            <a:off x="30232485" y="3238064"/>
             <a:ext cx="1024760" cy="923330"/>
           </a:xfrm>
           <a:prstGeom prst="rect">
@@ -5136,8 +4984,8 @@
         </p:nvSpPr>
         <p:spPr>
           <a:xfrm>
-            <a:off x="28669413" y="425869"/>
-            <a:ext cx="5610527" cy="5858778"/>
+            <a:off x="31589250" y="853201"/>
+            <a:ext cx="5610527" cy="902361"/>
           </a:xfrm>
           <a:prstGeom prst="rect">
             <a:avLst/>
@@ -5173,138 +5021,9 @@
                 <a:ea typeface="Linux Libertine" panose="02000503000000000000" pitchFamily="2" charset="0"/>
                 <a:cs typeface="Linux Libertine" panose="02000503000000000000" pitchFamily="2" charset="0"/>
               </a:rPr>
-              <a:t>Decoder</a:t>
-            </a:r>
-          </a:p>
-          <a:p>
-            <a:endParaRPr lang="en-US" sz="2400" u="sng" dirty="0">
-              <a:latin typeface="Linux Libertine" panose="02000503000000000000" pitchFamily="2" charset="0"/>
-              <a:ea typeface="Linux Libertine" panose="02000503000000000000" pitchFamily="2" charset="0"/>
-              <a:cs typeface="Linux Libertine" panose="02000503000000000000" pitchFamily="2" charset="0"/>
-            </a:endParaRPr>
-          </a:p>
-          <a:p>
-            <a:r>
-              <a:rPr lang="en-US" sz="8000" dirty="0">
-                <a:latin typeface="Linux Libertine" panose="02000503000000000000" pitchFamily="2" charset="0"/>
-                <a:ea typeface="Linux Libertine" panose="02000503000000000000" pitchFamily="2" charset="0"/>
-                <a:cs typeface="Linux Libertine" panose="02000503000000000000" pitchFamily="2" charset="0"/>
-              </a:rPr>
-              <a:t>∂</a:t>
-            </a:r>
-            <a:r>
-              <a:rPr lang="en-US" sz="5400" baseline="-25000" dirty="0"/>
-              <a:t>□</a:t>
-            </a:r>
-            <a:r>
-              <a:rPr lang="en-US" sz="8800" dirty="0">
-                <a:latin typeface="Linux Libertine" panose="02000503000000000000" pitchFamily="2" charset="0"/>
-                <a:ea typeface="Linux Libertine" panose="02000503000000000000" pitchFamily="2" charset="0"/>
-                <a:cs typeface="Linux Libertine" panose="02000503000000000000" pitchFamily="2" charset="0"/>
-              </a:rPr>
-              <a:t>E</a:t>
-            </a:r>
-          </a:p>
-          <a:p>
-            <a:r>
-              <a:rPr lang="en-US" sz="8000" baseline="-25000" dirty="0">
-                <a:latin typeface="Linux Libertine" panose="02000503000000000000" pitchFamily="2" charset="0"/>
-                <a:ea typeface="Linux Libertine" panose="02000503000000000000" pitchFamily="2" charset="0"/>
-                <a:cs typeface="Linux Libertine" panose="02000503000000000000" pitchFamily="2" charset="0"/>
-              </a:rPr>
-              <a:t>+</a:t>
-            </a:r>
-          </a:p>
-          <a:p>
-            <a:endParaRPr lang="en-US" sz="4800" baseline="-25000" dirty="0">
-              <a:latin typeface="Linux Libertine" panose="02000503000000000000" pitchFamily="2" charset="0"/>
-              <a:ea typeface="Linux Libertine" panose="02000503000000000000" pitchFamily="2" charset="0"/>
-              <a:cs typeface="Linux Libertine" panose="02000503000000000000" pitchFamily="2" charset="0"/>
-            </a:endParaRPr>
-          </a:p>
-          <a:p>
-            <a:r>
-              <a:rPr lang="en-US" sz="4400" dirty="0">
-                <a:latin typeface="Linux Libertine" panose="02000503000000000000" pitchFamily="2" charset="0"/>
-                <a:ea typeface="Linux Libertine" panose="02000503000000000000" pitchFamily="2" charset="0"/>
-                <a:cs typeface="Linux Libertine" panose="02000503000000000000" pitchFamily="2" charset="0"/>
-              </a:rPr>
-              <a:t>P(x</a:t>
-            </a:r>
-            <a:r>
-              <a:rPr lang="en-US" sz="4400" baseline="-25000" dirty="0">
-                <a:latin typeface="Linux Libertine" panose="02000503000000000000" pitchFamily="2" charset="0"/>
-                <a:ea typeface="Linux Libertine" panose="02000503000000000000" pitchFamily="2" charset="0"/>
-                <a:cs typeface="Linux Libertine" panose="02000503000000000000" pitchFamily="2" charset="0"/>
-              </a:rPr>
-              <a:t>t </a:t>
-            </a:r>
-            <a:r>
-              <a:rPr lang="en-US" sz="4400" dirty="0">
-                <a:latin typeface="Linux Libertine" panose="02000503000000000000" pitchFamily="2" charset="0"/>
-                <a:ea typeface="Linux Libertine" panose="02000503000000000000" pitchFamily="2" charset="0"/>
-                <a:cs typeface="Linux Libertine" panose="02000503000000000000" pitchFamily="2" charset="0"/>
-              </a:rPr>
-              <a:t>| x</a:t>
-            </a:r>
-            <a:r>
-              <a:rPr lang="en-US" sz="4400" baseline="-25000" dirty="0">
-                <a:latin typeface="Linux Libertine" panose="02000503000000000000" pitchFamily="2" charset="0"/>
-                <a:ea typeface="Linux Libertine" panose="02000503000000000000" pitchFamily="2" charset="0"/>
-                <a:cs typeface="Linux Libertine" panose="02000503000000000000" pitchFamily="2" charset="0"/>
-              </a:rPr>
-              <a:t>t-1</a:t>
-            </a:r>
-            <a:r>
-              <a:rPr lang="en-US" sz="4400" dirty="0">
-                <a:latin typeface="Linux Libertine" panose="02000503000000000000" pitchFamily="2" charset="0"/>
-                <a:ea typeface="Linux Libertine" panose="02000503000000000000" pitchFamily="2" charset="0"/>
-                <a:cs typeface="Linux Libertine" panose="02000503000000000000" pitchFamily="2" charset="0"/>
-              </a:rPr>
-              <a:t>, … ,</a:t>
-            </a:r>
-            <a:r>
-              <a:rPr lang="en-US" sz="4400" baseline="-25000" dirty="0">
-                <a:latin typeface="Linux Libertine" panose="02000503000000000000" pitchFamily="2" charset="0"/>
-                <a:ea typeface="Linux Libertine" panose="02000503000000000000" pitchFamily="2" charset="0"/>
-                <a:cs typeface="Linux Libertine" panose="02000503000000000000" pitchFamily="2" charset="0"/>
-              </a:rPr>
-              <a:t> </a:t>
-            </a:r>
-            <a:r>
-              <a:rPr lang="en-US" sz="4400" dirty="0">
-                <a:latin typeface="Linux Libertine" panose="02000503000000000000" pitchFamily="2" charset="0"/>
-                <a:ea typeface="Linux Libertine" panose="02000503000000000000" pitchFamily="2" charset="0"/>
-                <a:cs typeface="Linux Libertine" panose="02000503000000000000" pitchFamily="2" charset="0"/>
-              </a:rPr>
-              <a:t>x</a:t>
-            </a:r>
-            <a:r>
-              <a:rPr lang="en-US" sz="4400" baseline="-25000" dirty="0">
-                <a:latin typeface="Linux Libertine" panose="02000503000000000000" pitchFamily="2" charset="0"/>
-                <a:ea typeface="Linux Libertine" panose="02000503000000000000" pitchFamily="2" charset="0"/>
-                <a:cs typeface="Linux Libertine" panose="02000503000000000000" pitchFamily="2" charset="0"/>
-              </a:rPr>
-              <a:t>t-c</a:t>
-            </a:r>
-            <a:r>
-              <a:rPr lang="en-US" sz="4400" dirty="0">
-                <a:latin typeface="Linux Libertine" panose="02000503000000000000" pitchFamily="2" charset="0"/>
-                <a:ea typeface="Linux Libertine" panose="02000503000000000000" pitchFamily="2" charset="0"/>
-                <a:cs typeface="Linux Libertine" panose="02000503000000000000" pitchFamily="2" charset="0"/>
-              </a:rPr>
-              <a:t>)</a:t>
-            </a:r>
-          </a:p>
-          <a:p>
+              <a:t>WDFA Decoding</a:t>
+            </a:r>
             <a:endParaRPr lang="en-US" sz="4400" dirty="0">
-              <a:latin typeface="Linux Libertine" panose="02000503000000000000" pitchFamily="2" charset="0"/>
-              <a:ea typeface="Linux Libertine" panose="02000503000000000000" pitchFamily="2" charset="0"/>
-              <a:cs typeface="Linux Libertine" panose="02000503000000000000" pitchFamily="2" charset="0"/>
-            </a:endParaRPr>
-          </a:p>
-          <a:p>
-            <a:endParaRPr lang="en-US" sz="4500" u="sng" dirty="0">
               <a:latin typeface="Linux Libertine" panose="02000503000000000000" pitchFamily="2" charset="0"/>
               <a:ea typeface="Linux Libertine" panose="02000503000000000000" pitchFamily="2" charset="0"/>
               <a:cs typeface="Linux Libertine" panose="02000503000000000000" pitchFamily="2" charset="0"/>
@@ -5334,7 +5053,7 @@
         </p:blipFill>
         <p:spPr>
           <a:xfrm>
-            <a:off x="14102421" y="1828060"/>
+            <a:off x="14309000" y="1828060"/>
             <a:ext cx="7332519" cy="3685992"/>
           </a:xfrm>
           <a:prstGeom prst="rect">
@@ -5358,7 +5077,7 @@
         </p:nvSpPr>
         <p:spPr>
           <a:xfrm>
-            <a:off x="14495479" y="1001622"/>
+            <a:off x="14931522" y="1000426"/>
             <a:ext cx="6937631" cy="753940"/>
           </a:xfrm>
           <a:prstGeom prst="rect">
@@ -5428,8 +5147,8 @@
         </p:blipFill>
         <p:spPr>
           <a:xfrm>
-            <a:off x="23251232" y="1961615"/>
-            <a:ext cx="4980232" cy="3685992"/>
+            <a:off x="23776281" y="1927021"/>
+            <a:ext cx="5956933" cy="4408873"/>
           </a:xfrm>
           <a:prstGeom prst="rect">
             <a:avLst/>
@@ -5450,8 +5169,8 @@
         </p:nvSpPr>
         <p:spPr>
           <a:xfrm>
-            <a:off x="39352304" y="2947705"/>
-            <a:ext cx="1024760" cy="923330"/>
+            <a:off x="44399162" y="3409369"/>
+            <a:ext cx="606432" cy="923330"/>
           </a:xfrm>
           <a:prstGeom prst="rect">
             <a:avLst/>
@@ -5492,7 +5211,7 @@
         </p:nvSpPr>
         <p:spPr>
           <a:xfrm>
-            <a:off x="41422557" y="2123355"/>
+            <a:off x="46671889" y="2123355"/>
             <a:ext cx="4198926" cy="3507456"/>
           </a:xfrm>
           <a:prstGeom prst="rect">
@@ -5641,7 +5360,7 @@
         </p:nvSpPr>
         <p:spPr>
           <a:xfrm>
-            <a:off x="40798089" y="1101587"/>
+            <a:off x="46047422" y="1101588"/>
             <a:ext cx="4511161" cy="1046901"/>
           </a:xfrm>
           <a:prstGeom prst="rect">
@@ -5702,7 +5421,7 @@
         </p:nvSpPr>
         <p:spPr>
           <a:xfrm>
-            <a:off x="8916714" y="4842615"/>
+            <a:off x="8848973" y="4842615"/>
             <a:ext cx="951007" cy="923330"/>
           </a:xfrm>
           <a:prstGeom prst="rect">
@@ -5744,7 +5463,7 @@
         </p:nvSpPr>
         <p:spPr>
           <a:xfrm>
-            <a:off x="10021437" y="4124817"/>
+            <a:off x="9953696" y="4124818"/>
             <a:ext cx="2216761" cy="2435003"/>
           </a:xfrm>
           <a:prstGeom prst="bracePair">
@@ -5778,10 +5497,70 @@
           <a:lstStyle/>
           <a:p>
             <a:pPr algn="ctr"/>
-            <a:endParaRPr lang="en-US"/>
-          </a:p>
-        </p:txBody>
-      </p:sp>
+            <a:endParaRPr lang="en-US" dirty="0"/>
+          </a:p>
+        </p:txBody>
+      </p:sp>
+      <p:pic>
+        <p:nvPicPr>
+          <p:cNvPr id="39" name="Picture 38">
+            <a:extLst>
+              <a:ext uri="{FF2B5EF4-FFF2-40B4-BE49-F238E27FC236}">
+                <a16:creationId xmlns:a16="http://schemas.microsoft.com/office/drawing/2014/main" id="{BC3776DB-F564-F0DB-AD95-B9C0397953A7}"/>
+              </a:ext>
+            </a:extLst>
+          </p:cNvPr>
+          <p:cNvPicPr>
+            <a:picLocks noChangeAspect="1"/>
+          </p:cNvPicPr>
+          <p:nvPr/>
+        </p:nvPicPr>
+        <p:blipFill>
+          <a:blip r:embed="rId6"/>
+          <a:stretch>
+            <a:fillRect/>
+          </a:stretch>
+        </p:blipFill>
+        <p:spPr>
+          <a:xfrm>
+            <a:off x="39677993" y="1769111"/>
+            <a:ext cx="3835604" cy="4819242"/>
+          </a:xfrm>
+          <a:prstGeom prst="rect">
+            <a:avLst/>
+          </a:prstGeom>
+        </p:spPr>
+      </p:pic>
+      <p:pic>
+        <p:nvPicPr>
+          <p:cNvPr id="7" name="Picture 6">
+            <a:extLst>
+              <a:ext uri="{FF2B5EF4-FFF2-40B4-BE49-F238E27FC236}">
+                <a16:creationId xmlns:a16="http://schemas.microsoft.com/office/drawing/2014/main" id="{EBDF1769-5530-BB1A-6FD6-75D07B2B4240}"/>
+              </a:ext>
+            </a:extLst>
+          </p:cNvPr>
+          <p:cNvPicPr>
+            <a:picLocks noChangeAspect="1"/>
+          </p:cNvPicPr>
+          <p:nvPr/>
+        </p:nvPicPr>
+        <p:blipFill>
+          <a:blip r:embed="rId7"/>
+          <a:stretch>
+            <a:fillRect/>
+          </a:stretch>
+        </p:blipFill>
+        <p:spPr>
+          <a:xfrm>
+            <a:off x="31868300" y="1737485"/>
+            <a:ext cx="5398723" cy="4819243"/>
+          </a:xfrm>
+          <a:prstGeom prst="rect">
+            <a:avLst/>
+          </a:prstGeom>
+        </p:spPr>
+      </p:pic>
     </p:spTree>
     <p:extLst>
       <p:ext uri="{BB962C8B-B14F-4D97-AF65-F5344CB8AC3E}">
